--- a/media/resources/files/Onduktar_Akcha_KalkulyatorsuzIshtoo_Bingo_Oyunu.pptx
+++ b/media/resources/files/Onduktar_Akcha_KalkulyatorsuzIshtoo_Bingo_Oyunu.pptx
@@ -21070,7 +21070,7 @@
             </a:pPr>
             <a:r>
               <a:rPr lang="ru-RU" dirty="0"/>
-              <a:t>Турдуу пикирлер учун ыраазычылык билдиребиз.</a:t>
+              <a:t>Түрдүү пикирлер үчүн ыраазычылык билдиребиз.</a:t>
             </a:r>
           </a:p>
           <a:p>

--- a/media/resources/files/Onduktar_Akcha_KalkulyatorsuzIshtoo_Bingo_Oyunu.pptx
+++ b/media/resources/files/Onduktar_Akcha_KalkulyatorsuzIshtoo_Bingo_Oyunu.pptx
@@ -3818,7 +3818,7 @@
                 <a:ea typeface="+mn-ea"/>
                 <a:cs typeface="+mn-cs"/>
               </a:rPr>
-              <a:t>Окуучулар </a:t>
+              <a:t>Окуучулар тордон тогуз жоопту тандап, дептердеги 3х3 чакмакка каалагандай коюшат.</a:t>
             </a:r>
             <a:r>
               <a:rPr kumimoji="0" lang="ru-RU" sz="2000" b="0" i="0" u="none" strike="noStrike" kern="1200" cap="none" spc="0" normalizeH="0" baseline="0" noProof="0" dirty="0">
@@ -3835,7 +3835,7 @@
                 <a:ea typeface="+mn-ea"/>
                 <a:cs typeface="+mn-cs"/>
               </a:rPr>
-              <a:t>суроо</a:t>
+              <a:t/>
             </a:r>
             <a:r>
               <a:rPr kumimoji="0" lang="en-US" sz="2000" b="0" i="0" u="none" strike="noStrike" kern="1200" cap="none" spc="0" normalizeH="0" baseline="0" noProof="0" dirty="0">
@@ -3852,7 +3852,7 @@
                 <a:ea typeface="+mn-ea"/>
                 <a:cs typeface="+mn-cs"/>
               </a:rPr>
-              <a:t> </a:t>
+              <a:t/>
             </a:r>
             <a:r>
               <a:rPr kumimoji="0" lang="en-US" sz="2000" b="0" i="0" u="none" strike="noStrike" kern="1200" cap="none" spc="0" normalizeH="0" baseline="0" noProof="0" dirty="0" err="1">
@@ -3869,7 +3869,7 @@
                 <a:ea typeface="+mn-ea"/>
                 <a:cs typeface="+mn-cs"/>
               </a:rPr>
-              <a:t>тордон</a:t>
+              <a:t/>
             </a:r>
             <a:r>
               <a:rPr kumimoji="0" lang="en-US" sz="2000" b="0" i="0" u="none" strike="noStrike" kern="1200" cap="none" spc="0" normalizeH="0" baseline="0" noProof="0" dirty="0">
@@ -3886,7 +3886,7 @@
                 <a:ea typeface="+mn-ea"/>
                 <a:cs typeface="+mn-cs"/>
               </a:rPr>
-              <a:t> </a:t>
+              <a:t/>
             </a:r>
             <a:r>
               <a:rPr kumimoji="0" lang="en-US" sz="1800" b="0" i="0" u="none" strike="noStrike" kern="1200" cap="none" spc="0" normalizeH="0" baseline="0" noProof="0" dirty="0" err="1">
@@ -3903,7 +3903,7 @@
                 <a:ea typeface="+mn-ea"/>
                 <a:cs typeface="+mn-cs"/>
               </a:rPr>
-              <a:t>тогуз</a:t>
+              <a:t/>
             </a:r>
             <a:r>
               <a:rPr kumimoji="0" lang="en-US" sz="1800" b="0" i="0" u="none" strike="noStrike" kern="1200" cap="none" spc="0" normalizeH="0" baseline="0" noProof="0" dirty="0">
@@ -3920,7 +3920,7 @@
                 <a:ea typeface="+mn-ea"/>
                 <a:cs typeface="+mn-cs"/>
               </a:rPr>
-              <a:t> </a:t>
+              <a:t/>
             </a:r>
             <a:r>
               <a:rPr kumimoji="0" lang="en-US" sz="1800" b="0" i="0" u="none" strike="noStrike" kern="1200" cap="none" spc="0" normalizeH="0" baseline="0" noProof="0" dirty="0" err="1">
@@ -3937,7 +3937,7 @@
                 <a:ea typeface="+mn-ea"/>
                 <a:cs typeface="+mn-cs"/>
               </a:rPr>
-              <a:t>жоопту</a:t>
+              <a:t/>
             </a:r>
             <a:r>
               <a:rPr kumimoji="0" lang="en-US" sz="1800" b="0" i="0" u="none" strike="noStrike" kern="1200" cap="none" spc="0" normalizeH="0" baseline="0" noProof="0" dirty="0">
@@ -3954,7 +3954,7 @@
                 <a:ea typeface="+mn-ea"/>
                 <a:cs typeface="+mn-cs"/>
               </a:rPr>
-              <a:t> </a:t>
+              <a:t/>
             </a:r>
             <a:r>
               <a:rPr kumimoji="0" lang="en-US" sz="1800" b="0" i="0" u="none" strike="noStrike" kern="1200" cap="none" spc="0" normalizeH="0" baseline="0" noProof="0" dirty="0" err="1">
@@ -3971,7 +3971,7 @@
                 <a:ea typeface="+mn-ea"/>
                 <a:cs typeface="+mn-cs"/>
               </a:rPr>
-              <a:t>тандап</a:t>
+              <a:t/>
             </a:r>
             <a:r>
               <a:rPr kumimoji="0" lang="en-US" sz="1800" b="0" i="0" u="none" strike="noStrike" kern="1200" cap="none" spc="0" normalizeH="0" baseline="0" noProof="0" dirty="0">
@@ -3988,7 +3988,7 @@
                 <a:ea typeface="+mn-ea"/>
                 <a:cs typeface="+mn-cs"/>
               </a:rPr>
-              <a:t>, </a:t>
+              <a:t/>
             </a:r>
             <a:r>
               <a:rPr kumimoji="0" lang="en-US" sz="1800" b="0" i="0" u="none" strike="noStrike" kern="1200" cap="none" spc="0" normalizeH="0" baseline="0" noProof="0" dirty="0" err="1">
@@ -4005,7 +4005,7 @@
                 <a:ea typeface="+mn-ea"/>
                 <a:cs typeface="+mn-cs"/>
               </a:rPr>
-              <a:t>аларды</a:t>
+              <a:t/>
             </a:r>
             <a:r>
               <a:rPr kumimoji="0" lang="en-US" sz="1800" b="0" i="0" u="none" strike="noStrike" kern="1200" cap="none" spc="0" normalizeH="0" baseline="0" noProof="0" dirty="0">
@@ -4022,7 +4022,7 @@
                 <a:ea typeface="+mn-ea"/>
                 <a:cs typeface="+mn-cs"/>
               </a:rPr>
-              <a:t> </a:t>
+              <a:t/>
             </a:r>
             <a:r>
               <a:rPr kumimoji="0" lang="ru-RU" sz="1800" b="0" i="0" u="none" strike="noStrike" kern="1200" cap="none" spc="0" normalizeH="0" baseline="0" noProof="0" dirty="0">
@@ -4039,7 +4039,7 @@
                 <a:ea typeface="+mn-ea"/>
                 <a:cs typeface="+mn-cs"/>
               </a:rPr>
-              <a:t>дептериндеги</a:t>
+              <a:t/>
             </a:r>
             <a:r>
               <a:rPr kumimoji="0" lang="en-US" sz="1800" b="0" i="0" u="none" strike="noStrike" kern="1200" cap="none" spc="0" normalizeH="0" baseline="0" noProof="0" dirty="0">
@@ -4056,7 +4056,7 @@
                 <a:ea typeface="+mn-ea"/>
                 <a:cs typeface="+mn-cs"/>
               </a:rPr>
-              <a:t> 3х3 </a:t>
+              <a:t/>
             </a:r>
             <a:r>
               <a:rPr kumimoji="0" lang="en-US" sz="1800" b="0" i="0" u="none" strike="noStrike" kern="1200" cap="none" spc="0" normalizeH="0" baseline="0" noProof="0" dirty="0" err="1">
@@ -4073,7 +4073,7 @@
                 <a:ea typeface="+mn-ea"/>
                 <a:cs typeface="+mn-cs"/>
               </a:rPr>
-              <a:t>квадратка</a:t>
+              <a:t/>
             </a:r>
             <a:r>
               <a:rPr kumimoji="0" lang="en-US" sz="1800" b="0" i="0" u="none" strike="noStrike" kern="1200" cap="none" spc="0" normalizeH="0" baseline="0" noProof="0" dirty="0">
@@ -4090,7 +4090,7 @@
                 <a:ea typeface="+mn-ea"/>
                 <a:cs typeface="+mn-cs"/>
               </a:rPr>
-              <a:t> </a:t>
+              <a:t/>
             </a:r>
             <a:r>
               <a:rPr kumimoji="0" lang="en-US" sz="1800" b="0" i="0" u="none" strike="noStrike" kern="1200" cap="none" spc="0" normalizeH="0" baseline="0" noProof="0" dirty="0" err="1">
@@ -4107,7 +4107,7 @@
                 <a:ea typeface="+mn-ea"/>
                 <a:cs typeface="+mn-cs"/>
               </a:rPr>
-              <a:t>туш</a:t>
+              <a:t/>
             </a:r>
             <a:r>
               <a:rPr kumimoji="0" lang="en-US" sz="1800" b="0" i="0" u="none" strike="noStrike" kern="1200" cap="none" spc="0" normalizeH="0" baseline="0" noProof="0" dirty="0">
@@ -4124,7 +4124,7 @@
                 <a:ea typeface="+mn-ea"/>
                 <a:cs typeface="+mn-cs"/>
               </a:rPr>
-              <a:t> </a:t>
+              <a:t/>
             </a:r>
             <a:r>
               <a:rPr kumimoji="0" lang="en-US" sz="1800" b="0" i="0" u="none" strike="noStrike" kern="1200" cap="none" spc="0" normalizeH="0" baseline="0" noProof="0" dirty="0" err="1">
@@ -4141,7 +4141,7 @@
                 <a:ea typeface="+mn-ea"/>
                 <a:cs typeface="+mn-cs"/>
               </a:rPr>
-              <a:t>келди</a:t>
+              <a:t/>
             </a:r>
             <a:r>
               <a:rPr kumimoji="0" lang="en-US" sz="1800" b="0" i="0" u="none" strike="noStrike" kern="1200" cap="none" spc="0" normalizeH="0" baseline="0" noProof="0" dirty="0">
@@ -4158,7 +4158,7 @@
                 <a:ea typeface="+mn-ea"/>
                 <a:cs typeface="+mn-cs"/>
               </a:rPr>
-              <a:t> </a:t>
+              <a:t/>
             </a:r>
             <a:r>
               <a:rPr kumimoji="0" lang="en-US" sz="1800" b="0" i="0" u="none" strike="noStrike" kern="1200" cap="none" spc="0" normalizeH="0" baseline="0" noProof="0" dirty="0" err="1">
@@ -4175,7 +4175,7 @@
                 <a:ea typeface="+mn-ea"/>
                 <a:cs typeface="+mn-cs"/>
               </a:rPr>
-              <a:t>жайгаштырышы</a:t>
+              <a:t/>
             </a:r>
             <a:r>
               <a:rPr kumimoji="0" lang="en-US" sz="1800" b="0" i="0" u="none" strike="noStrike" kern="1200" cap="none" spc="0" normalizeH="0" baseline="0" noProof="0" dirty="0">
@@ -4192,7 +4192,7 @@
                 <a:ea typeface="+mn-ea"/>
                 <a:cs typeface="+mn-cs"/>
               </a:rPr>
-              <a:t> </a:t>
+              <a:t/>
             </a:r>
             <a:r>
               <a:rPr kumimoji="0" lang="en-US" sz="1800" b="0" i="0" u="none" strike="noStrike" kern="1200" cap="none" spc="0" normalizeH="0" baseline="0" noProof="0" dirty="0" err="1">
@@ -4209,7 +4209,7 @@
                 <a:ea typeface="+mn-ea"/>
                 <a:cs typeface="+mn-cs"/>
               </a:rPr>
-              <a:t>керек</a:t>
+              <a:t/>
             </a:r>
             <a:r>
               <a:rPr kumimoji="0" lang="en-US" sz="1800" b="0" i="0" u="none" strike="noStrike" kern="1200" cap="none" spc="0" normalizeH="0" baseline="0" noProof="0" dirty="0">
@@ -4226,7 +4226,7 @@
                 <a:ea typeface="+mn-ea"/>
                 <a:cs typeface="+mn-cs"/>
               </a:rPr>
-              <a:t>.</a:t>
+              <a:t/>
             </a:r>
           </a:p>
           <a:p>
@@ -5728,7 +5728,7 @@
                   <a:schemeClr val="tx1"/>
                 </a:solidFill>
               </a:rPr>
-              <a:t>26.61</a:t>
+              <a:t>26,61</a:t>
             </a:r>
             <a:r>
               <a:rPr lang="ky-KG" sz="4400" dirty="0">
@@ -5777,7 +5777,7 @@
             <a:pPr algn="ctr"/>
             <a:r>
               <a:rPr lang="en-GB" sz="4400" dirty="0"/>
-              <a:t>638.64</a:t>
+              <a:t>638,64</a:t>
             </a:r>
             <a:r>
               <a:rPr lang="ky-KG" sz="4400" dirty="0"/>
@@ -6298,7 +6298,7 @@
             <a:pPr algn="ctr"/>
             <a:r>
               <a:rPr lang="en-GB" sz="4400" dirty="0"/>
-              <a:t>598.83</a:t>
+              <a:t>598,83</a:t>
             </a:r>
             <a:r>
               <a:rPr lang="ky-KG" sz="4400" dirty="0"/>
@@ -6459,7 +6459,7 @@
                   <a:schemeClr val="tx1"/>
                 </a:solidFill>
               </a:rPr>
-              <a:t>199.61</a:t>
+              <a:t>199,61</a:t>
             </a:r>
             <a:r>
               <a:rPr lang="ky-KG" sz="4400" dirty="0">
@@ -6882,7 +6882,7 @@
             <a:pPr algn="ctr"/>
             <a:r>
               <a:rPr lang="en-GB" sz="4400" dirty="0"/>
-              <a:t>948.1</a:t>
+              <a:t>948,1</a:t>
             </a:r>
             <a:r>
               <a:rPr lang="ky-KG" sz="4400" dirty="0"/>
@@ -7043,7 +7043,7 @@
                   <a:schemeClr val="tx1"/>
                 </a:solidFill>
               </a:rPr>
-              <a:t>49.90</a:t>
+              <a:t>49,90</a:t>
             </a:r>
             <a:r>
               <a:rPr lang="ky-KG" sz="4400" dirty="0">
@@ -7501,7 +7501,7 @@
                   <a:schemeClr val="tx1"/>
                 </a:solidFill>
               </a:rPr>
-              <a:t>2328.79</a:t>
+              <a:t>2328,79</a:t>
             </a:r>
             <a:r>
               <a:rPr lang="ky-KG" sz="4400" dirty="0">
@@ -7550,7 +7550,7 @@
             <a:pPr algn="ctr"/>
             <a:r>
               <a:rPr lang="en-GB" sz="4400" dirty="0"/>
-              <a:t>9315.18</a:t>
+              <a:t>9315,18</a:t>
             </a:r>
             <a:r>
               <a:rPr lang="ky-KG" sz="4400" dirty="0"/>
@@ -8050,7 +8050,7 @@
             <a:pPr algn="ctr"/>
             <a:r>
               <a:rPr lang="en-GB" sz="4400" dirty="0"/>
-              <a:t>1197.67</a:t>
+              <a:t>1197,67</a:t>
             </a:r>
             <a:r>
               <a:rPr lang="ky-KG" sz="4400" dirty="0"/>
@@ -8212,7 +8212,7 @@
                   <a:schemeClr val="tx1"/>
                 </a:solidFill>
               </a:rPr>
-              <a:t>39.92</a:t>
+              <a:t>39,92</a:t>
             </a:r>
             <a:r>
               <a:rPr lang="ky-KG" sz="4400" dirty="0">
@@ -8628,7 +8628,7 @@
             <a:pPr algn="ctr"/>
             <a:r>
               <a:rPr lang="en-GB" sz="4400" dirty="0"/>
-              <a:t>6930.94</a:t>
+              <a:t>6930,94</a:t>
             </a:r>
             <a:r>
               <a:rPr lang="ky-KG" sz="4400" dirty="0"/>
@@ -8790,7 +8790,7 @@
                   <a:schemeClr val="tx1"/>
                 </a:solidFill>
               </a:rPr>
-              <a:t>1386.19</a:t>
+              <a:t>1386,19</a:t>
             </a:r>
             <a:r>
               <a:rPr lang="ky-KG" sz="4400" dirty="0">
@@ -9241,7 +9241,7 @@
                   <a:schemeClr val="tx1"/>
                 </a:solidFill>
               </a:rPr>
-              <a:t>16.63</a:t>
+              <a:t>16,63</a:t>
             </a:r>
             <a:r>
               <a:rPr lang="ky-KG" sz="4400" dirty="0">
@@ -9290,7 +9290,7 @@
             <a:pPr algn="ctr"/>
             <a:r>
               <a:rPr lang="en-GB" sz="4400" dirty="0"/>
-              <a:t>1497.08</a:t>
+              <a:t>1497,08</a:t>
             </a:r>
             <a:r>
               <a:rPr lang="ky-KG" sz="4400" dirty="0"/>
@@ -9628,7 +9628,7 @@
             <a:pPr algn="ctr"/>
             <a:r>
               <a:rPr lang="en-GB" sz="4400" dirty="0"/>
-              <a:t>11311.29</a:t>
+              <a:t>11311,29</a:t>
             </a:r>
             <a:r>
               <a:rPr lang="ky-KG" sz="4400" dirty="0"/>
@@ -9973,7 +9973,7 @@
                   <a:schemeClr val="tx1"/>
                 </a:solidFill>
               </a:rPr>
-              <a:t>1885.21</a:t>
+              <a:t>1885,21</a:t>
             </a:r>
             <a:r>
               <a:rPr lang="ky-KG" sz="4400" dirty="0">
@@ -10396,7 +10396,7 @@
             <a:pPr algn="ctr"/>
             <a:r>
               <a:rPr lang="en-GB" sz="4400" dirty="0"/>
-              <a:t>2640.82</a:t>
+              <a:t>2640,82</a:t>
             </a:r>
             <a:r>
               <a:rPr lang="ky-KG" sz="4400" dirty="0"/>
@@ -10642,7 +10642,7 @@
                   <a:schemeClr val="tx1"/>
                 </a:solidFill>
               </a:rPr>
-              <a:t>754.52 </a:t>
+              <a:t>754,52 </a:t>
             </a:r>
             <a:r>
               <a:rPr lang="ky-KG" sz="4400" dirty="0">
@@ -11065,7 +11065,7 @@
             <a:pPr algn="ctr"/>
             <a:r>
               <a:rPr lang="en-GB" sz="4400" dirty="0"/>
-              <a:t>11,234.56</a:t>
+              <a:t>11 234,56</a:t>
             </a:r>
             <a:r>
               <a:rPr lang="ky-KG" sz="4400" dirty="0"/>
@@ -11227,7 +11227,7 @@
                   <a:schemeClr val="tx1"/>
                 </a:solidFill>
               </a:rPr>
-              <a:t>2496.57</a:t>
+              <a:t>2496,57</a:t>
             </a:r>
             <a:r>
               <a:rPr lang="ky-KG" sz="4400" dirty="0">
@@ -21222,7 +21222,7 @@
                             <a:schemeClr val="tx1"/>
                           </a:solidFill>
                         </a:rPr>
-                        <a:t>472.08</a:t>
+                        <a:t>472,08</a:t>
                       </a:r>
                       <a:r>
                         <a:rPr lang="ky-KG" sz="4000" dirty="0">
@@ -21318,7 +21318,7 @@
                             <a:schemeClr val="tx1"/>
                           </a:solidFill>
                         </a:rPr>
-                        <a:t>638.64</a:t>
+                        <a:t>638,64</a:t>
                       </a:r>
                       <a:endParaRPr kumimoji="0" lang="en-GB" sz="4000" b="0" i="0" u="none" strike="noStrike" kern="1200" cap="none" spc="0" normalizeH="0" baseline="0" noProof="0" dirty="0">
                         <a:ln>
@@ -21406,7 +21406,7 @@
                             <a:schemeClr val="tx1"/>
                           </a:solidFill>
                         </a:rPr>
-                        <a:t>6930.94</a:t>
+                        <a:t>6930,94</a:t>
                       </a:r>
                       <a:endParaRPr kumimoji="0" lang="en-GB" sz="4000" b="0" i="0" u="none" strike="noStrike" kern="1200" cap="none" spc="0" normalizeH="0" baseline="0" noProof="0" dirty="0">
                         <a:ln>
@@ -21494,7 +21494,7 @@
                             <a:schemeClr val="tx1"/>
                           </a:solidFill>
                         </a:rPr>
-                        <a:t>6986.38</a:t>
+                        <a:t>6986,38</a:t>
                       </a:r>
                       <a:endParaRPr kumimoji="0" lang="en-GB" sz="4000" b="0" i="0" u="none" strike="noStrike" kern="1200" cap="none" spc="0" normalizeH="0" baseline="0" noProof="0" dirty="0">
                         <a:ln>
@@ -21585,7 +21585,7 @@
                       </a:pPr>
                       <a:r>
                         <a:rPr lang="en-GB" sz="4000" dirty="0"/>
-                        <a:t>948.1</a:t>
+                        <a:t>948,1</a:t>
                       </a:r>
                       <a:r>
                         <a:rPr lang="ky-KG" sz="4000" dirty="0"/>
@@ -21648,7 +21648,7 @@
                       <a:pPr algn="ctr"/>
                       <a:r>
                         <a:rPr lang="ky-KG" sz="4000" dirty="0"/>
-                        <a:t>887.15</a:t>
+                        <a:t>887,15</a:t>
                       </a:r>
                       <a:endParaRPr lang="en-GB" sz="4000" dirty="0"/>
                     </a:p>
@@ -21719,7 +21719,7 @@
                       </a:pPr>
                       <a:r>
                         <a:rPr lang="en-GB" sz="4000" dirty="0"/>
-                        <a:t>1319.65</a:t>
+                        <a:t>1319,65</a:t>
                       </a:r>
                       <a:endParaRPr lang="en-GB" sz="4000" dirty="0">
                         <a:solidFill>
@@ -21794,7 +21794,7 @@
                       </a:pPr>
                       <a:r>
                         <a:rPr lang="en-GB" sz="4000" dirty="0"/>
-                        <a:t>11311.29</a:t>
+                        <a:t>11311,29</a:t>
                       </a:r>
                       <a:endParaRPr lang="en-GB" sz="4000" dirty="0">
                         <a:solidFill>
@@ -21876,7 +21876,7 @@
                       </a:pPr>
                       <a:r>
                         <a:rPr lang="en-GB" sz="4000" dirty="0"/>
-                        <a:t>332.64</a:t>
+                        <a:t>332,64</a:t>
                       </a:r>
                       <a:endParaRPr kumimoji="0" lang="en-GB" sz="4000" b="0" i="0" u="none" strike="noStrike" kern="1200" cap="none" spc="0" normalizeH="0" baseline="0" noProof="0" dirty="0">
                         <a:ln>
@@ -21960,7 +21960,7 @@
                       </a:pPr>
                       <a:r>
                         <a:rPr lang="en-GB" sz="4000" dirty="0"/>
-                        <a:t>2640.82</a:t>
+                        <a:t>2640,82</a:t>
                       </a:r>
                       <a:endParaRPr kumimoji="0" lang="en-GB" sz="4000" b="0" i="0" u="none" strike="noStrike" kern="1200" cap="none" spc="0" normalizeH="0" baseline="0" noProof="0" dirty="0">
                         <a:ln>
@@ -22044,7 +22044,7 @@
                       </a:pPr>
                       <a:r>
                         <a:rPr lang="en-GB" sz="4000" dirty="0"/>
-                        <a:t>11,234.56</a:t>
+                        <a:t>11 234,56</a:t>
                       </a:r>
                       <a:endParaRPr kumimoji="0" lang="en-GB" sz="4000" b="0" i="0" u="none" strike="noStrike" kern="1200" cap="none" spc="0" normalizeH="0" baseline="0" noProof="0" dirty="0">
                         <a:ln>
@@ -22128,7 +22128,7 @@
                       </a:pPr>
                       <a:r>
                         <a:rPr lang="en-GB" sz="4000" dirty="0"/>
-                        <a:t>9315.18</a:t>
+                        <a:t>9315,18</a:t>
                       </a:r>
                       <a:endParaRPr kumimoji="0" lang="en-GB" sz="4000" b="0" i="0" u="none" strike="noStrike" kern="1200" cap="none" spc="0" normalizeH="0" baseline="0" noProof="0" dirty="0">
                         <a:ln>
@@ -22219,7 +22219,7 @@
                       </a:pPr>
                       <a:r>
                         <a:rPr lang="en-GB" sz="4000" dirty="0"/>
-                        <a:t>1497.08</a:t>
+                        <a:t>1497,08</a:t>
                       </a:r>
                       <a:endParaRPr lang="en-GB" sz="4000" dirty="0">
                         <a:solidFill>
@@ -22294,7 +22294,7 @@
                       </a:pPr>
                       <a:r>
                         <a:rPr lang="en-GB" sz="4000" dirty="0"/>
-                        <a:t>1197.67</a:t>
+                        <a:t>1197,67</a:t>
                       </a:r>
                       <a:endParaRPr lang="en-GB" sz="4000" dirty="0">
                         <a:solidFill>
@@ -22369,7 +22369,7 @@
                       </a:pPr>
                       <a:r>
                         <a:rPr lang="en-GB" sz="4000" dirty="0"/>
-                        <a:t>532.30</a:t>
+                        <a:t>532,30</a:t>
                       </a:r>
                       <a:endParaRPr lang="en-GB" sz="4000" dirty="0">
                         <a:solidFill>
@@ -22444,7 +22444,7 @@
                       </a:pPr>
                       <a:r>
                         <a:rPr lang="en-GB" sz="4000" dirty="0"/>
-                        <a:t>598.83</a:t>
+                        <a:t>598,83</a:t>
                       </a:r>
                       <a:endParaRPr lang="en-GB" sz="4000" dirty="0">
                         <a:solidFill>
@@ -23667,7 +23667,7 @@
             <a:pPr algn="ctr"/>
             <a:r>
               <a:rPr lang="ky-KG" sz="4400" dirty="0"/>
-              <a:t>472.08 сом</a:t>
+              <a:t>472,08 сом</a:t>
             </a:r>
             <a:endParaRPr lang="en-GB" sz="4400" dirty="0"/>
           </a:p>
@@ -23843,7 +23843,7 @@
                   <a:schemeClr val="tx1"/>
                 </a:solidFill>
               </a:rPr>
-              <a:t>.72</a:t>
+              <a:t>,72</a:t>
             </a:r>
             <a:r>
               <a:rPr lang="ky-KG" sz="4400" dirty="0">
@@ -24266,7 +24266,7 @@
             <a:pPr algn="ctr"/>
             <a:r>
               <a:rPr lang="ky-KG" sz="4400" dirty="0"/>
-              <a:t>887.15сом</a:t>
+              <a:t>887,15сом</a:t>
             </a:r>
             <a:endParaRPr lang="en-GB" sz="4400" dirty="0"/>
           </a:p>
@@ -24418,7 +24418,7 @@
                   <a:schemeClr val="tx1"/>
                 </a:solidFill>
               </a:rPr>
-              <a:t>177.43сом</a:t>
+              <a:t>177,43сом</a:t>
             </a:r>
             <a:endParaRPr lang="en-GB" sz="4400" dirty="0">
               <a:solidFill>
@@ -24833,7 +24833,7 @@
             <a:pPr algn="ctr"/>
             <a:r>
               <a:rPr lang="en-GB" sz="4400" dirty="0"/>
-              <a:t>1319.65</a:t>
+              <a:t>1319,65</a:t>
             </a:r>
             <a:r>
               <a:rPr lang="ky-KG" sz="4400" dirty="0"/>
@@ -25005,7 +25005,7 @@
                   <a:schemeClr val="tx1"/>
                 </a:solidFill>
               </a:rPr>
-              <a:t>377.04</a:t>
+              <a:t>377,04</a:t>
             </a:r>
             <a:r>
               <a:rPr lang="ky-KG" sz="4400" dirty="0">
@@ -25421,7 +25421,7 @@
             <a:pPr algn="ctr"/>
             <a:r>
               <a:rPr lang="en-GB" sz="4400" dirty="0"/>
-              <a:t>532.30</a:t>
+              <a:t>532,30</a:t>
             </a:r>
             <a:r>
               <a:rPr lang="ky-KG" sz="4400" dirty="0"/>
@@ -25583,7 +25583,7 @@
                   <a:schemeClr val="tx1"/>
                 </a:solidFill>
               </a:rPr>
-              <a:t>88.72</a:t>
+              <a:t>88,72</a:t>
             </a:r>
             <a:r>
               <a:rPr lang="ky-KG" sz="4400" dirty="0">
@@ -26077,7 +26077,7 @@
                   <a:schemeClr val="tx1"/>
                 </a:solidFill>
               </a:rPr>
-              <a:t>1397.28</a:t>
+              <a:t>1397,28</a:t>
             </a:r>
             <a:r>
               <a:rPr lang="ky-KG" sz="4400" dirty="0">
@@ -26126,7 +26126,7 @@
             <a:pPr algn="ctr"/>
             <a:r>
               <a:rPr lang="en-GB" sz="4400" dirty="0"/>
-              <a:t>6986.38</a:t>
+              <a:t>6986,38</a:t>
             </a:r>
             <a:r>
               <a:rPr lang="ky-KG" sz="4400" dirty="0"/>
@@ -26584,7 +26584,7 @@
             <a:pPr algn="ctr"/>
             <a:r>
               <a:rPr lang="en-GB" sz="4400" dirty="0"/>
-              <a:t>332.64</a:t>
+              <a:t>332,64</a:t>
             </a:r>
             <a:r>
               <a:rPr lang="ky-KG" sz="4400" dirty="0"/>
@@ -26746,7 +26746,7 @@
                   <a:schemeClr val="tx1"/>
                 </a:solidFill>
               </a:rPr>
-              <a:t>27.72</a:t>
+              <a:t>27,72</a:t>
             </a:r>
             <a:r>
               <a:rPr lang="ky-KG" sz="4400" dirty="0">

--- a/media/resources/files/Onduktar_Akcha_KalkulyatorsuzIshtoo_Bingo_Oyunu.pptx
+++ b/media/resources/files/Onduktar_Akcha_KalkulyatorsuzIshtoo_Bingo_Oyunu.pptx
@@ -9628,7 +9628,7 @@
             <a:pPr algn="ctr"/>
             <a:r>
               <a:rPr lang="en-GB" sz="4400" dirty="0"/>
-              <a:t>11311,29</a:t>
+              <a:t>11 311,29</a:t>
             </a:r>
             <a:r>
               <a:rPr lang="ky-KG" sz="4400" dirty="0"/>
@@ -21794,7 +21794,7 @@
                       </a:pPr>
                       <a:r>
                         <a:rPr lang="en-GB" sz="4000" dirty="0"/>
-                        <a:t>11311,29</a:t>
+                        <a:t>11 311,29</a:t>
                       </a:r>
                       <a:endParaRPr lang="en-GB" sz="4000" dirty="0">
                         <a:solidFill>
